--- a/output/同浦汇_30场活动与科技企业服务中心筹备_业务承接策划案.pptx
+++ b/output/同浦汇_30场活动与科技企业服务中心筹备_业务承接策划案.pptx
@@ -13178,7 +13178,7 @@
                 <a:ea typeface="微软雅黑"/>
                 <a:cs typeface="微软雅黑"/>
               </a:rPr>
-              <a:t>1.  创智汇上周已确定更换赛道：由原 AI+IP 内容线，转向与建筑设计、智能建造结合的方向，并与同济设计资源、中建相关方主业相匹配。</a:t>
+              <a:t>1.  上周已定换赛道：由 AI+IP 转为建筑设计 + 智能建造，匹配同济设计资源与中建相关方主业。</a:t>
             </a:r>
           </a:p>
           <a:p>
@@ -13199,7 +13199,7 @@
                 <a:ea typeface="微软雅黑"/>
                 <a:cs typeface="微软雅黑"/>
               </a:rPr>
-              <a:t>2.  新方向按「现代服务业 + 新一代信息技术」包装，科技赋能建筑，不与高新/载体政策申报发生本质冲突。</a:t>
+              <a:t>2.  按「现代服务业 + 新一代信息技术」包装，科技赋能建筑，不与高新/载体申报本质冲突。</a:t>
             </a:r>
           </a:p>
           <a:p>
@@ -13220,7 +13220,7 @@
                 <a:ea typeface="微软雅黑"/>
                 <a:cs typeface="微软雅黑"/>
               </a:rPr>
-              <a:t>3.  核心目标不是把地产施工企业招来租办公室，而是搭建「建筑产业出海」集群：设计、测绘、模块化、绿色低碳、施工机器人可成为出口内容。</a:t>
+              <a:t>3.  目标不是招施工企业来租办公室，而是做建筑产业出海集群（设计、模块化、绿色低碳、施工机器人）。</a:t>
             </a:r>
           </a:p>
           <a:p>
@@ -13241,7 +13241,7 @@
                 <a:ea typeface="微软雅黑"/>
                 <a:cs typeface="微软雅黑"/>
               </a:rPr>
-              <a:t>4.  会上研判：传统建筑施工景气与回款能力明显弱于人工智能赛道，若仍按招租逻辑推进，后续难以说服审核方，也难以支撑活动转化。</a:t>
+              <a:t>4.  会上研判：传统施工回款弱于人工智能赛道，按招租逻辑难以过审、也难转化。</a:t>
             </a:r>
           </a:p>
           <a:p>
@@ -13262,7 +13262,7 @@
                 <a:ea typeface="微软雅黑"/>
                 <a:cs typeface="微软雅黑"/>
               </a:rPr>
-              <a:t>5.  对外口径须谨慎：业主写杨浦科创集团；不宜简单用「中建」名义对接政府资源。</a:t>
+              <a:t>5.  业主写杨浦科创集团；不宜简单用「中建」名义对接政府资源。</a:t>
             </a:r>
           </a:p>
           <a:p>
@@ -13283,7 +13283,7 @@
                 <a:ea typeface="微软雅黑"/>
                 <a:cs typeface="微软雅黑"/>
               </a:rPr>
-              <a:t>6.  复旦大学住房政策研究中心可提供行业数据、活动组织、专家网络与海外专题经验，作为白皮书、授牌与出海研究的学术支持，不替代同浦汇的园区接口地位。</a:t>
+              <a:t>6.  复旦住房政策研究中心提供数据、专家与白皮书支持，不替代同浦汇的园区接口。</a:t>
             </a:r>
           </a:p>
         </p:txBody>
@@ -13415,7 +13415,7 @@
                 <a:ea typeface="微软雅黑"/>
                 <a:cs typeface="微软雅黑"/>
               </a:rPr>
-              <a:t>7.  出海优先城市化率较低的一带一路、东南亚、中亚、非洲、中东市场；产品抓手为绿色低碳 + 建筑施工机器人 + 模块化建筑（含越南等地已有就地建厂探索）。</a:t>
+              <a:t>7.  出海优先城市化率较低的一带一路、东南亚、中亚、非洲、中东；抓手为绿色低碳 + 机器人 + 模块化。</a:t>
             </a:r>
           </a:p>
           <a:p>
@@ -13436,7 +13436,7 @@
                 <a:ea typeface="微软雅黑"/>
                 <a:cs typeface="微软雅黑"/>
               </a:rPr>
-              <a:t>8.  政策路径：引导入驻企业把经营范围写入智能施工、绿色节能，自行完成高新技术企业认定；可参考广州越秀零碳体验馆，用研学参观形成稳定运营，不完全依赖补贴。</a:t>
+              <a:t>8.  引导企业写入智能施工/绿色节能并自行报高新；零碳馆可走研学，不完全靠补贴。</a:t>
             </a:r>
           </a:p>
           <a:p>
@@ -13457,7 +13457,7 @@
                 <a:ea typeface="微软雅黑"/>
                 <a:cs typeface="微软雅黑"/>
               </a:rPr>
-              <a:t>9.  空间抓手：展厅约 500㎡ 做建筑出海科技与模块化产品展示，其余空间承载新材料等。</a:t>
+              <a:t>9.  展厅约 500㎡ 做建筑出海主题展示，其余空间承载新材料。</a:t>
             </a:r>
           </a:p>
           <a:p>
@@ -13478,7 +13478,7 @@
                 <a:ea typeface="微软雅黑"/>
                 <a:cs typeface="微软雅黑"/>
               </a:rPr>
-              <a:t>10.  驻沪领馆资源按目标国匹配（会上口径约 80+），领事到访不纳入 30 场年包。</a:t>
+              <a:t>10.  驻沪领馆按目标国匹配（会上口径约 80+）；领事到访不纳入 30 场年包。</a:t>
             </a:r>
           </a:p>
           <a:p>
@@ -13499,7 +13499,7 @@
                 <a:ea typeface="微软雅黑"/>
                 <a:cs typeface="微软雅黑"/>
               </a:rPr>
-              <a:t>11.  节奏：合同口径已调整、运营成本已经发生；需尽快形成可交给审核方工程部门的初步方案。</a:t>
+              <a:t>11.  合同口径已变、运营成本已发生，需尽快形成可交审核方工程部门的初步方案。</a:t>
             </a:r>
           </a:p>
         </p:txBody>
@@ -28523,7 +28523,7 @@
                 <a:ea typeface="微软雅黑"/>
                 <a:cs typeface="微软雅黑"/>
               </a:rPr>
-              <a:t>人数核验</a:t>
+              <a:t>≤30 人</a:t>
             </a:r>
           </a:p>
         </p:txBody>
@@ -28565,7 +28565,7 @@
                 <a:ea typeface="微软雅黑"/>
                 <a:cs typeface="微软雅黑"/>
               </a:rPr>
-              <a:t>每场 ≤30 人（可核验）</a:t>
+              <a:t>单场签到核验</a:t>
             </a:r>
           </a:p>
         </p:txBody>
@@ -28655,7 +28655,7 @@
                 <a:ea typeface="微软雅黑"/>
                 <a:cs typeface="微软雅黑"/>
               </a:rPr>
-              <a:t>负责人</a:t>
+              <a:t>≤30%</a:t>
             </a:r>
           </a:p>
         </p:txBody>
@@ -28697,7 +28697,7 @@
                 <a:ea typeface="微软雅黑"/>
                 <a:cs typeface="微软雅黑"/>
               </a:rPr>
-              <a:t>≤30%，不做 100% 承兑</a:t>
+              <a:t>负责人占比上限</a:t>
             </a:r>
           </a:p>
         </p:txBody>
@@ -28787,7 +28787,7 @@
                 <a:ea typeface="微软雅黑"/>
                 <a:cs typeface="微软雅黑"/>
               </a:rPr>
-              <a:t>全年触达</a:t>
+              <a:t>600+</a:t>
             </a:r>
           </a:p>
         </p:txBody>
@@ -28829,7 +28829,7 @@
                 <a:ea typeface="微软雅黑"/>
                 <a:cs typeface="微软雅黑"/>
               </a:rPr>
-              <a:t>全年约 600+ 人次</a:t>
+              <a:t>全年触达人次</a:t>
             </a:r>
           </a:p>
         </p:txBody>
@@ -28919,7 +28919,7 @@
                 <a:ea typeface="微软雅黑"/>
                 <a:cs typeface="微软雅黑"/>
               </a:rPr>
-              <a:t>交付物</a:t>
+              <a:t>月报</a:t>
             </a:r>
           </a:p>
         </p:txBody>
@@ -28961,7 +28961,7 @@
                 <a:ea typeface="微软雅黑"/>
                 <a:cs typeface="微软雅黑"/>
               </a:rPr>
-              <a:t>方案、签到、现场执行、月报；回访只交摘要知会，不要求园区逐户回访</a:t>
+              <a:t>方案 / 签到 / 执行摘要</a:t>
             </a:r>
           </a:p>
         </p:txBody>
